--- a/dist/초2/수학/수와계산/초2_수학_수와계산_11_1과0의곱,곱셈표_학생용.pptx
+++ b/dist/초2/수학/수와계산/초2_수학_수와계산_11_1과0의곱,곱셈표_학생용.pptx
@@ -120,13 +120,13 @@
   <p:extLst>
     <p:ext uri="{521415D9-36F7-43E2-AB2F-B90AF26B5E84}">
       <p14:sectionLst xmlns:p14="http://schemas.microsoft.com/office/powerpoint/2010/main">
-        <p14:section name="도입" id="{a3e4d0e6-c825-406b-b11d-bd16590ea148}">
+        <p14:section name="도입" id="{cb88c4dc-e387-4801-2335-e2e3a1fbd84b}">
           <p14:sldIdLst>
             <p14:sldId id="256"/>
             <p14:sldId id="257"/>
           </p14:sldIdLst>
         </p14:section>
-        <p14:section name="개념" id="{4a51e6eb-897e-1d01-eba2-e99ab3f88665}">
+        <p14:section name="개념" id="{fdc2c408-36bf-5d80-74df-56c0492deb5b}">
           <p14:sldIdLst>
             <p14:sldId id="258"/>
             <p14:sldId id="259"/>
@@ -135,25 +135,25 @@
             <p14:sldId id="262"/>
           </p14:sldIdLst>
         </p14:section>
-        <p14:section name="연습" id="{ac55eddd-fb61-e418-4409-a15fbc9b2a3d}">
+        <p14:section name="연습" id="{3c922433-812b-771b-7616-754def25e334}">
           <p14:sldIdLst>
             <p14:sldId id="263"/>
             <p14:sldId id="264"/>
             <p14:sldId id="265"/>
           </p14:sldIdLst>
         </p14:section>
-        <p14:section name="확인" id="{f8ba94e9-192c-a9b5-8a7d-97037b76cc3c}">
+        <p14:section name="확인" id="{098a76b2-c7c9-058b-6359-aa347e2187b7}">
           <p14:sldIdLst>
             <p14:sldId id="266"/>
             <p14:sldId id="267"/>
           </p14:sldIdLst>
         </p14:section>
-        <p14:section name="정리" id="{ca8a337b-2a52-8447-b761-58850a63f5d9}">
+        <p14:section name="정리" id="{e58ba9f1-d710-5bb6-bde0-abba8eb96ffd}">
           <p14:sldIdLst>
             <p14:sldId id="268"/>
           </p14:sldIdLst>
         </p14:section>
-        <p14:section name="보충" id="{43a483b6-9c91-c9bc-a853-449289d2f8da}">
+        <p14:section name="보충" id="{da8bfaa8-3113-e9c9-9070-5373bf56731c}">
           <p14:sldIdLst>
             <p14:sldId id="269"/>
           </p14:sldIdLst>

--- a/dist/초2/수학/수와계산/초2_수학_수와계산_11_1과0의곱,곱셈표_학생용.pptx
+++ b/dist/초2/수학/수와계산/초2_수학_수와계산_11_1과0의곱,곱셈표_학생용.pptx
@@ -120,13 +120,13 @@
   <p:extLst>
     <p:ext uri="{521415D9-36F7-43E2-AB2F-B90AF26B5E84}">
       <p14:sectionLst xmlns:p14="http://schemas.microsoft.com/office/powerpoint/2010/main">
-        <p14:section name="도입" id="{cb88c4dc-e387-4801-2335-e2e3a1fbd84b}">
+        <p14:section name="도입" id="{75ec00f6-3799-40f6-691b-7bdba87cf970}">
           <p14:sldIdLst>
             <p14:sldId id="256"/>
             <p14:sldId id="257"/>
           </p14:sldIdLst>
         </p14:section>
-        <p14:section name="개념" id="{fdc2c408-36bf-5d80-74df-56c0492deb5b}">
+        <p14:section name="개념" id="{41a4f22d-1526-8513-13a2-0dd2d0ccac34}">
           <p14:sldIdLst>
             <p14:sldId id="258"/>
             <p14:sldId id="259"/>
@@ -135,25 +135,25 @@
             <p14:sldId id="262"/>
           </p14:sldIdLst>
         </p14:section>
-        <p14:section name="연습" id="{3c922433-812b-771b-7616-754def25e334}">
+        <p14:section name="연습" id="{b1b5d325-2728-109b-6224-4ff02de33b7e}">
           <p14:sldIdLst>
             <p14:sldId id="263"/>
             <p14:sldId id="264"/>
             <p14:sldId id="265"/>
           </p14:sldIdLst>
         </p14:section>
-        <p14:section name="확인" id="{098a76b2-c7c9-058b-6359-aa347e2187b7}">
+        <p14:section name="확인" id="{236a1a0d-1e88-cd65-a924-d12a716cebb4}">
           <p14:sldIdLst>
             <p14:sldId id="266"/>
             <p14:sldId id="267"/>
           </p14:sldIdLst>
         </p14:section>
-        <p14:section name="정리" id="{e58ba9f1-d710-5bb6-bde0-abba8eb96ffd}">
+        <p14:section name="정리" id="{b153f766-5c35-8128-99b9-c0accb8ea29e}">
           <p14:sldIdLst>
             <p14:sldId id="268"/>
           </p14:sldIdLst>
         </p14:section>
-        <p14:section name="보충" id="{da8bfaa8-3113-e9c9-9070-5373bf56731c}">
+        <p14:section name="보충" id="{c235a2f9-5c10-531c-3bff-0b8e76cdc421}">
           <p14:sldIdLst>
             <p14:sldId id="269"/>
           </p14:sldIdLst>
@@ -8960,7 +8960,7 @@
           </p:nvPr>
         </p:nvGraphicFramePr>
         <p:xfrm>
-          <a:off x="2802636" y="2245360"/>
+          <a:off x="2802636" y="2286635"/>
           <a:ext cx="6583680" cy="914400"/>
         </p:xfrm>
         <a:graphic>
@@ -8973,7 +8973,7 @@
                 <a:gridCol w="1645920"/>
                 <a:gridCol w="1645920"/>
               </a:tblGrid>
-              <a:tr h="528320">
+              <a:tr h="511810">
                 <a:tc>
                   <a:txBody>
                     <a:bodyPr/>
@@ -9247,7 +9247,7 @@
                   </a:tcPr>
                 </a:tc>
               </a:tr>
-              <a:tr h="528320">
+              <a:tr h="511810">
                 <a:tc>
                   <a:txBody>
                     <a:bodyPr/>
@@ -9521,7 +9521,7 @@
                   </a:tcPr>
                 </a:tc>
               </a:tr>
-              <a:tr h="528320">
+              <a:tr h="511810">
                 <a:tc>
                   <a:txBody>
                     <a:bodyPr/>
@@ -9795,7 +9795,7 @@
                   </a:tcPr>
                 </a:tc>
               </a:tr>
-              <a:tr h="528320">
+              <a:tr h="511810">
                 <a:tc>
                   <a:txBody>
                     <a:bodyPr/>
@@ -10069,7 +10069,7 @@
                   </a:tcPr>
                 </a:tc>
               </a:tr>
-              <a:tr h="528320">
+              <a:tr h="511810">
                 <a:tc>
                   <a:txBody>
                     <a:bodyPr/>
@@ -11023,7 +11023,7 @@
           </p:nvPr>
         </p:nvGraphicFramePr>
         <p:xfrm>
-          <a:off x="2436876" y="1420622"/>
+          <a:off x="2436876" y="1470152"/>
           <a:ext cx="7315200" cy="914400"/>
         </p:xfrm>
         <a:graphic>
@@ -11038,7 +11038,7 @@
                 <a:gridCol w="1219200"/>
                 <a:gridCol w="1219200"/>
               </a:tblGrid>
-              <a:tr h="528320">
+              <a:tr h="511810">
                 <a:tc>
                   <a:txBody>
                     <a:bodyPr/>
@@ -11448,7 +11448,7 @@
                   </a:tcPr>
                 </a:tc>
               </a:tr>
-              <a:tr h="528320">
+              <a:tr h="511810">
                 <a:tc>
                   <a:txBody>
                     <a:bodyPr/>
@@ -11858,7 +11858,7 @@
                   </a:tcPr>
                 </a:tc>
               </a:tr>
-              <a:tr h="528320">
+              <a:tr h="511810">
                 <a:tc>
                   <a:txBody>
                     <a:bodyPr/>
@@ -12268,7 +12268,7 @@
                   </a:tcPr>
                 </a:tc>
               </a:tr>
-              <a:tr h="528320">
+              <a:tr h="511810">
                 <a:tc>
                   <a:txBody>
                     <a:bodyPr/>
@@ -12678,7 +12678,7 @@
                   </a:tcPr>
                 </a:tc>
               </a:tr>
-              <a:tr h="528320">
+              <a:tr h="511810">
                 <a:tc>
                   <a:txBody>
                     <a:bodyPr/>
@@ -13088,7 +13088,7 @@
                   </a:tcPr>
                 </a:tc>
               </a:tr>
-              <a:tr h="528320">
+              <a:tr h="511810">
                 <a:tc>
                   <a:txBody>
                     <a:bodyPr/>
@@ -13631,7 +13631,7 @@
           </p:nvPr>
         </p:nvGraphicFramePr>
         <p:xfrm>
-          <a:off x="548640" y="1333500"/>
+          <a:off x="548640" y="1409700"/>
           <a:ext cx="11091672" cy="914400"/>
         </p:xfrm>
         <a:graphic>
@@ -13650,7 +13650,7 @@
                 <a:gridCol w="1109167"/>
                 <a:gridCol w="1109167"/>
               </a:tblGrid>
-              <a:tr h="487680">
+              <a:tr h="472440">
                 <a:tc>
                   <a:txBody>
                     <a:bodyPr/>
@@ -14332,7 +14332,7 @@
                   </a:tcPr>
                 </a:tc>
               </a:tr>
-              <a:tr h="487680">
+              <a:tr h="472440">
                 <a:tc>
                   <a:txBody>
                     <a:bodyPr/>
@@ -15014,7 +15014,7 @@
                   </a:tcPr>
                 </a:tc>
               </a:tr>
-              <a:tr h="487680">
+              <a:tr h="472440">
                 <a:tc>
                   <a:txBody>
                     <a:bodyPr/>
@@ -15696,7 +15696,7 @@
                   </a:tcPr>
                 </a:tc>
               </a:tr>
-              <a:tr h="487680">
+              <a:tr h="472440">
                 <a:tc>
                   <a:txBody>
                     <a:bodyPr/>
@@ -16378,7 +16378,7 @@
                   </a:tcPr>
                 </a:tc>
               </a:tr>
-              <a:tr h="487680">
+              <a:tr h="472440">
                 <a:tc>
                   <a:txBody>
                     <a:bodyPr/>
@@ -17060,7 +17060,7 @@
                   </a:tcPr>
                 </a:tc>
               </a:tr>
-              <a:tr h="487680">
+              <a:tr h="472440">
                 <a:tc>
                   <a:txBody>
                     <a:bodyPr/>
@@ -17742,7 +17742,7 @@
                   </a:tcPr>
                 </a:tc>
               </a:tr>
-              <a:tr h="487680">
+              <a:tr h="472440">
                 <a:tc>
                   <a:txBody>
                     <a:bodyPr/>
@@ -18424,7 +18424,7 @@
                   </a:tcPr>
                 </a:tc>
               </a:tr>
-              <a:tr h="487680">
+              <a:tr h="472440">
                 <a:tc>
                   <a:txBody>
                     <a:bodyPr/>
@@ -19106,7 +19106,7 @@
                   </a:tcPr>
                 </a:tc>
               </a:tr>
-              <a:tr h="487680">
+              <a:tr h="472440">
                 <a:tc>
                   <a:txBody>
                     <a:bodyPr/>
@@ -19788,7 +19788,7 @@
                   </a:tcPr>
                 </a:tc>
               </a:tr>
-              <a:tr h="487680">
+              <a:tr h="472440">
                 <a:tc>
                   <a:txBody>
                     <a:bodyPr/>
